--- a/eval/dataset/files/practical.pptx
+++ b/eval/dataset/files/practical.pptx
@@ -6164,7 +6164,7 @@
         <p:spPr>
           <a:xfrm>
             <a:off x="731520" y="3108960"/>
-            <a:ext cx="4572000" cy="2743200"/>
+            <a:ext cx="4572000" cy="3149600"/>
           </a:xfrm>
           <a:prstGeom prst="rect">
             <a:avLst/>
